--- a/docs/공공데이터_내비게이터_구현정리_v1.0.pptx
+++ b/docs/공공데이터_내비게이터_구현정리_v1.0.pptx
@@ -512,7 +512,7 @@
           <a:p>
             <a:r>
               <a:rPr lang="en-US" dirty="0"/>
-              <a:t>설계서 v1.0 확정판(동결) 기반. 기존 구현은 백업 후 삭제, M1(1층 정본+MCP)과 M2(웹 비생성형)를 재구현.</a:t>
+              <a:t>설계서 v1.0 확정판(동결) 기반. AIRD 진단은 제2부 v0.87 표준 MMI(D5-03·D6-01·D7-01·D7-02) 기준이며 DM-0은 참고 공시. 벌크 정본(datasets/catalog-records/quality-annotations NDJSON) 산출.</a:t>
             </a:r>
             <a:endParaRPr lang="en-US" dirty="0"/>
           </a:p>
@@ -1876,7 +1876,7 @@
                 <a:ea typeface="Arial" pitchFamily="34" charset="-122"/>
                 <a:cs typeface="Arial" pitchFamily="34" charset="-120"/>
               </a:rPr>
-              <a:t>설계서 v1.0 확정판 기반 M1 + M2 재구현  ·  스냅샷 2026-02  ·  2026-07-17</a:t>
+              <a:t>설계서 v1.0 확정판 기반 M1 + M2 — 코어 구현 후보(beta)  ·  스냅샷 2026-02  ·  2026-07-17</a:t>
             </a:r>
             <a:endParaRPr lang="en-US" sz="1300" dirty="0"/>
           </a:p>
@@ -2137,7 +2137,7 @@
                 <a:ea typeface="Arial" pitchFamily="34" charset="-122"/>
                 <a:cs typeface="Arial" pitchFamily="34" charset="-120"/>
               </a:rPr>
-              <a:t>DM-0</a:t>
+              <a:t>DM-0 (참고)</a:t>
             </a:r>
             <a:endParaRPr lang="en-US" sz="2100" dirty="0"/>
           </a:p>
@@ -2176,7 +2176,7 @@
                 <a:ea typeface="Arial" pitchFamily="34" charset="-122"/>
                 <a:cs typeface="Arial" pitchFamily="34" charset="-120"/>
               </a:rPr>
-              <a:t>AIRD 자가 진단</a:t>
+              <a:t>AIRD 표준 MMI 진단</a:t>
             </a:r>
             <a:endParaRPr lang="en-US" sz="1050" dirty="0"/>
           </a:p>
@@ -6119,7 +6119,7 @@
                 <a:ea typeface="Arial" pitchFamily="34" charset="-122"/>
                 <a:cs typeface="Arial" pitchFamily="34" charset="-120"/>
               </a:rPr>
-              <a:t>0.9996</a:t>
+              <a:t>0.9999</a:t>
             </a:r>
             <a:endParaRPr lang="en-US" sz="3000" dirty="0"/>
           </a:p>
@@ -6158,7 +6158,7 @@
                 <a:ea typeface="Arial" pitchFamily="34" charset="-122"/>
                 <a:cs typeface="Arial" pitchFamily="34" charset="-120"/>
               </a:rPr>
-              <a:t>QI_MMI → DM-0 부여</a:t>
+              <a:t>QI_MMI → DM-0 (참고)</a:t>
             </a:r>
             <a:endParaRPr lang="en-US" sz="1150" dirty="0"/>
           </a:p>
@@ -6200,7 +6200,7 @@
                 <a:ea typeface="Arial" pitchFamily="34" charset="-122"/>
                 <a:cs typeface="Arial" pitchFamily="34" charset="-120"/>
               </a:rPr>
-              <a:t>MMI 8지표 전수 측정, 임계 0.7 (aird-mmi-v1.0)</a:t>
+              <a:t>표준 MMI 4지표 D5-03·D6-01·D7-01·D7-02, 임계 0.7 (aird-mmi-v1.1)</a:t>
             </a:r>
             <a:endParaRPr lang="en-US" sz="950" dirty="0"/>
           </a:p>
@@ -6427,7 +6427,7 @@
                 <a:ea typeface="Arial" pitchFamily="34" charset="-122"/>
                 <a:cs typeface="Arial" pitchFamily="34" charset="-120"/>
               </a:rPr>
-              <a:t>14종</a:t>
+              <a:t>16종</a:t>
             </a:r>
             <a:endParaRPr lang="en-US" sz="3000" dirty="0"/>
           </a:p>

--- a/docs/공공데이터_내비게이터_구현정리_v1.0.pptx
+++ b/docs/공공데이터_내비게이터_구현정리_v1.0.pptx
@@ -1876,7 +1876,7 @@
                 <a:ea typeface="Arial" pitchFamily="34" charset="-122"/>
                 <a:cs typeface="Arial" pitchFamily="34" charset="-120"/>
               </a:rPr>
-              <a:t>설계서 v1.0 확정판 기반 M1 + M2 — 코어 구현 후보(beta)  ·  스냅샷 2026-02  ·  2026-07-17</a:t>
+              <a:t>설계서 v1.0 확정판 기반 M1 + M2 — 코어 구현 후보(beta)  ·  스냅샷 2026-06  ·  2026-07-17</a:t>
             </a:r>
             <a:endParaRPr lang="en-US" sz="1300" dirty="0"/>
           </a:p>
@@ -1937,7 +1937,7 @@
                 <a:ea typeface="Arial" pitchFamily="34" charset="-122"/>
                 <a:cs typeface="Arial" pitchFamily="34" charset="-120"/>
               </a:rPr>
-              <a:t>95,793건</a:t>
+              <a:t>96,056건</a:t>
             </a:r>
             <a:endParaRPr lang="en-US" sz="2100" dirty="0"/>
           </a:p>
@@ -2691,7 +2691,7 @@
                 <a:ea typeface="Arial" pitchFamily="34" charset="-122"/>
                 <a:cs typeface="Arial" pitchFamily="34" charset="-120"/>
               </a:rPr>
-              <a:t>정직한 빈 상태</a:t>
+              <a:t>실데이터 diff 가동</a:t>
             </a:r>
             <a:endParaRPr lang="en-US" sz="1350" dirty="0"/>
           </a:p>
@@ -2733,7 +2733,7 @@
                 <a:ea typeface="Arial" pitchFamily="34" charset="-122"/>
                 <a:cs typeface="Arial" pitchFamily="34" charset="-120"/>
               </a:rPr>
-              <a:t>현재는 첫 스냅샷이라 "비교 기준 이전 스냅샷이 없습니다" 경고를 그대로 노출 — 없는 데이터를 꾸미지 않음</a:t>
+              <a:t>기준 2026-02 → 현재 2026-06: 총 69,676건 변경 판정(MODIFIED 60,790 · ADDED 1,666 · MISSING 1,403 등)</a:t>
             </a:r>
             <a:endParaRPr lang="en-US" sz="1150" dirty="0"/>
           </a:p>
@@ -2816,7 +2816,7 @@
                 <a:ea typeface="Arial" pitchFamily="34" charset="-122"/>
                 <a:cs typeface="Arial" pitchFamily="34" charset="-120"/>
               </a:rPr>
-              <a:t>diff 검증 완료</a:t>
+              <a:t>기관 개편 자동 감지</a:t>
             </a:r>
             <a:endParaRPr lang="en-US" sz="1350" dirty="0"/>
           </a:p>
@@ -2858,7 +2858,7 @@
                 <a:ea typeface="Arial" pitchFamily="34" charset="-122"/>
                 <a:cs typeface="Arial" pitchFamily="34" charset="-120"/>
               </a:rPr>
-              <a:t>합성 스냅샷으로 6개 상태 전 경로 검증(95건 전부 기대치 일치). 3월 CSV 확보 즉시 실데이터 diff 가동</a:t>
+              <a:t>전남광주통합특별시 출범, 한국보육진흥원 개칭 등 5,817건이 POSSIBLE_IDENTITY_CHANGE로 포착 — §6 환류 인사이트 첫 실사례</a:t>
             </a:r>
             <a:endParaRPr lang="en-US" sz="1150" dirty="0"/>
           </a:p>
@@ -3270,7 +3270,7 @@
                 <a:ea typeface="Arial" pitchFamily="34" charset="-122"/>
                 <a:cs typeface="Arial" pitchFamily="34" charset="-120"/>
               </a:rPr>
-              <a:t>3월 목록개방현황 CSV 확보 → 실데이터 diff</a:t>
+              <a:t>부속 명세 초안 작성 → 공개 계약 동결 준비</a:t>
             </a:r>
             <a:endParaRPr lang="en-US" sz="1150" dirty="0"/>
           </a:p>
@@ -5965,7 +5965,7 @@
                 <a:ea typeface="Arial" pitchFamily="34" charset="-122"/>
                 <a:cs typeface="Arial" pitchFamily="34" charset="-120"/>
               </a:rPr>
-              <a:t>95,793</a:t>
+              <a:t>96,056</a:t>
             </a:r>
             <a:endParaRPr lang="en-US" sz="3000" dirty="0"/>
           </a:p>
@@ -6004,7 +6004,7 @@
                 <a:ea typeface="Arial" pitchFamily="34" charset="-122"/>
                 <a:cs typeface="Arial" pitchFamily="34" charset="-120"/>
               </a:rPr>
-              <a:t>적재 레코드 (2026-02)</a:t>
+              <a:t>적재 레코드 (2026-06)</a:t>
             </a:r>
             <a:endParaRPr lang="en-US" sz="1150" dirty="0"/>
           </a:p>
@@ -6119,7 +6119,7 @@
                 <a:ea typeface="Arial" pitchFamily="34" charset="-122"/>
                 <a:cs typeface="Arial" pitchFamily="34" charset="-120"/>
               </a:rPr>
-              <a:t>0.9999</a:t>
+              <a:t>1.0</a:t>
             </a:r>
             <a:endParaRPr lang="en-US" sz="3000" dirty="0"/>
           </a:p>
@@ -6630,7 +6630,7 @@
                 <a:ea typeface="Arial" pitchFamily="34" charset="-122"/>
                 <a:cs typeface="Arial" pitchFamily="34" charset="-120"/>
               </a:rPr>
-              <a:t>목록키 이중 등재 22건</a:t>
+              <a:t>목록키 이중 등재 처리</a:t>
             </a:r>
             <a:endParaRPr lang="en-US" sz="1350" dirty="0"/>
           </a:p>
@@ -6672,7 +6672,7 @@
                 <a:ea typeface="Arial" pitchFamily="34" charset="-122"/>
                 <a:cs typeface="Arial" pitchFamily="34" charset="-120"/>
               </a:rPr>
-              <a:t>FILE/API 두 유형으로 등재된 동일 목록키 → {목록키}-{유형}으로 분리 보존, DUPLICATE_LIST_KEY 이슈 관찰 (record-identity-v1.0)</a:t>
+              <a:t>FILE/API 이중 등재는 불변 URI(목록키)를 공유하고 record_id로 분리 보존 + 이슈 관찰. 2026-02: 22건 → 2026-06: 0건(포털 측 해소 확인)</a:t>
             </a:r>
             <a:endParaRPr lang="en-US" sz="1150" dirty="0"/>
           </a:p>
@@ -6797,7 +6797,7 @@
                 <a:ea typeface="Arial" pitchFamily="34" charset="-122"/>
                 <a:cs typeface="Arial" pitchFamily="34" charset="-120"/>
               </a:rPr>
-              <a:t>전화번호 백틱이 전 행의 99.6%에서 발견 — 행별이 아닌 카탈로그 수준 관찰 1건으로 축약 (이슈 124건으로 정리)</a:t>
+              <a:t>전화번호 백틱이 전 행의 99% 이상에서 발견 — 행별이 아닌 카탈로그 수준 관찰 1건으로 축약 (2026-06 기준 이슈 15건)</a:t>
             </a:r>
             <a:endParaRPr lang="en-US" sz="1150" dirty="0"/>
           </a:p>
@@ -8715,7 +8715,7 @@
                 <a:ea typeface="Arial" pitchFamily="34" charset="-122"/>
                 <a:cs typeface="Arial" pitchFamily="34" charset="-120"/>
               </a:rPr>
-              <a:t>골든셋 v0 실측 (BM25, 스냅샷 2026-02, 질의 50개)</a:t>
+              <a:t>골든셋 v0 실측 (BM25, 스냅샷 2026-06, 질의 50개)</a:t>
             </a:r>
             <a:endParaRPr lang="en-US" sz="1500" dirty="0"/>
           </a:p>
@@ -8788,7 +8788,7 @@
                 <a:ea typeface="Arial" pitchFamily="34" charset="-122"/>
                 <a:cs typeface="Arial" pitchFamily="34" charset="-120"/>
               </a:rPr>
-              <a:t>0.878</a:t>
+              <a:t>0.876</a:t>
             </a:r>
             <a:endParaRPr lang="en-US" sz="3000" dirty="0"/>
           </a:p>
@@ -8942,7 +8942,7 @@
                 <a:ea typeface="Arial" pitchFamily="34" charset="-122"/>
                 <a:cs typeface="Arial" pitchFamily="34" charset="-120"/>
               </a:rPr>
-              <a:t>0.884</a:t>
+              <a:t>0.882</a:t>
             </a:r>
             <a:endParaRPr lang="en-US" sz="3000" dirty="0"/>
           </a:p>
@@ -9096,7 +9096,7 @@
                 <a:ea typeface="Arial" pitchFamily="34" charset="-122"/>
                 <a:cs typeface="Arial" pitchFamily="34" charset="-120"/>
               </a:rPr>
-              <a:t>0.906</a:t>
+              <a:t>0.905</a:t>
             </a:r>
             <a:endParaRPr lang="en-US" sz="3000" dirty="0"/>
           </a:p>
@@ -9659,7 +9659,7 @@
                 <a:ea typeface="Arial" pitchFamily="34" charset="-122"/>
                 <a:cs typeface="Arial" pitchFamily="34" charset="-120"/>
               </a:rPr>
-              <a:t>diff 파이프라인 실전 검증</a:t>
+              <a:t>실데이터 diff 가동 (2026-02 → 2026-06)</a:t>
             </a:r>
             <a:endParaRPr lang="en-US" sz="1350" dirty="0"/>
           </a:p>
@@ -9701,7 +9701,7 @@
                 <a:ea typeface="Arial" pitchFamily="34" charset="-122"/>
                 <a:cs typeface="Arial" pitchFamily="34" charset="-120"/>
               </a:rPr>
-              <a:t>합성 2026-03 스냅샷: ADDED 10 · MODIFIED 50 · IDENTITY 5 · MISSING 30 — 판정 전부 기대치와 일치, 검증 후 원상 복구</a:t>
+              <a:t>MODIFIED 60,790 · 정체성 변경 의심 5,817 · ADDED 1,666 · MISSING 1,403 — 합성 스냅샷 검증 후 실데이터 전환 완료</a:t>
             </a:r>
             <a:endParaRPr lang="en-US" sz="1150" dirty="0"/>
           </a:p>
@@ -9951,7 +9951,7 @@
                 <a:ea typeface="Arial" pitchFamily="34" charset="-122"/>
                 <a:cs typeface="Arial" pitchFamily="34" charset="-120"/>
               </a:rPr>
-              <a:t>재빌드 시 실행 중 API가 포인터 교체를 감지해 무중단 전환 (이슈 95,555건→124건 정리 배포)</a:t>
+              <a:t>재빌드 시 실행 중 API가 포인터 교체를 감지해 무중단 전환 — 2026-02→2026-06 교체도 동일 경로로 무중단 수행</a:t>
             </a:r>
             <a:endParaRPr lang="en-US" sz="1150" dirty="0"/>
           </a:p>
@@ -10805,7 +10805,7 @@
                 <a:ea typeface="Arial" pitchFamily="34" charset="-122"/>
                 <a:cs typeface="Arial" pitchFamily="34" charset="-120"/>
               </a:rPr>
-              <a:t>우측 상단 상태 칩: 현재 스냅샷(2026-02) · 데이터 건수 · 분석 기준일을 모든 화면에서 상시 노출</a:t>
+              <a:t>우측 상단 상태 칩: 현재 스냅샷(2026-06) · 데이터 건수 · 분석 기준일을 모든 화면에서 상시 노출</a:t>
             </a:r>
             <a:endParaRPr lang="en-US" sz="1050" dirty="0"/>
           </a:p>
@@ -12388,7 +12388,7 @@
                 <a:ea typeface="Arial" pitchFamily="34" charset="-122"/>
                 <a:cs typeface="Arial" pitchFamily="34" charset="-120"/>
               </a:rPr>
-              <a:t>evidenceLevel: CATALOG_METADATA_ONLY, sourceSnapshot: 2026-02 — 정본에도 근거 수준이 새겨짐</a:t>
+              <a:t>evidenceLevel: CATALOG_METADATA_ONLY, sourceSnapshot: 2026-06 — 정본에도 근거 수준이 새겨짐</a:t>
             </a:r>
             <a:endParaRPr lang="en-US" sz="1050" dirty="0"/>
           </a:p>
